--- a/Expo_Requerimientos[1].pptx
+++ b/Expo_Requerimientos[1].pptx
@@ -271,6 +271,11 @@
       </a:defRPr>
     </a:lvl9pPr>
   </p:defaultTextStyle>
+  <p:extLst>
+    <p:ext uri="{EFAFB233-063F-42B5-8137-9DF3F51BA10A}">
+      <p15:sldGuideLst xmlns:p15="http://schemas.microsoft.com/office/powerpoint/2012/main"/>
+    </p:ext>
+  </p:extLst>
 </p:presentation>
 </file>
 
@@ -14365,8 +14370,8 @@
         </p:nvSpPr>
         <p:spPr>
           <a:xfrm>
-            <a:off x="1732850" y="1401569"/>
-            <a:ext cx="2641500" cy="804600"/>
+            <a:off x="1732849" y="1401569"/>
+            <a:ext cx="2796479" cy="804600"/>
           </a:xfrm>
           <a:prstGeom prst="rect">
             <a:avLst/>
@@ -14389,7 +14394,7 @@
             </a:pPr>
             <a:r>
               <a:rPr lang="en" dirty="0"/>
-              <a:t>CONTROL DE LOS SEMAFOROS</a:t>
+              <a:t>CONTROL DE SEMAFOROS CON TIEMPOS AJUSTABLES</a:t>
             </a:r>
             <a:endParaRPr dirty="0"/>
           </a:p>
@@ -14641,7 +14646,7 @@
             </a:pPr>
             <a:r>
               <a:rPr lang="en" dirty="0"/>
-              <a:t>TIEMPOS AJUSTABLES</a:t>
+              <a:t>BOTÓN PARA PEDIR PRIORIDAD</a:t>
             </a:r>
             <a:endParaRPr dirty="0"/>
           </a:p>
@@ -15837,37 +15842,6 @@
           <a:chExt cx="0" cy="0"/>
         </a:xfrm>
       </p:grpSpPr>
-      <p:pic>
-        <p:nvPicPr>
-          <p:cNvPr id="30" name="Imagen 29">
-            <a:extLst>
-              <a:ext uri="{FF2B5EF4-FFF2-40B4-BE49-F238E27FC236}">
-                <a16:creationId xmlns:a16="http://schemas.microsoft.com/office/drawing/2014/main" id="{CF2D702E-A094-BA3E-2854-31DE7F247DD6}"/>
-              </a:ext>
-            </a:extLst>
-          </p:cNvPr>
-          <p:cNvPicPr>
-            <a:picLocks noChangeAspect="1"/>
-          </p:cNvPicPr>
-          <p:nvPr/>
-        </p:nvPicPr>
-        <p:blipFill>
-          <a:blip r:embed="rId3"/>
-          <a:srcRect l="5437"/>
-          <a:stretch>
-            <a:fillRect/>
-          </a:stretch>
-        </p:blipFill>
-        <p:spPr>
-          <a:xfrm>
-            <a:off x="597408" y="979800"/>
-            <a:ext cx="5831526" cy="3716826"/>
-          </a:xfrm>
-          <a:prstGeom prst="rect">
-            <a:avLst/>
-          </a:prstGeom>
-        </p:spPr>
-      </p:pic>
       <p:sp>
         <p:nvSpPr>
           <p:cNvPr id="344" name="Google Shape;344;p30"/>
@@ -15929,15 +15903,15 @@
           <p:nvPr/>
         </p:nvPicPr>
         <p:blipFill>
-          <a:blip r:embed="rId4"/>
+          <a:blip r:embed="rId3"/>
           <a:stretch>
             <a:fillRect/>
           </a:stretch>
         </p:blipFill>
         <p:spPr>
           <a:xfrm>
-            <a:off x="5898518" y="361503"/>
-            <a:ext cx="1942966" cy="1457224"/>
+            <a:off x="6050159" y="342628"/>
+            <a:ext cx="1562986" cy="1172239"/>
           </a:xfrm>
           <a:prstGeom prst="rect">
             <a:avLst/>
@@ -15959,14 +15933,14 @@
           <p:nvPr>
             <p:extLst>
               <p:ext uri="{D42A27DB-BD31-4B8C-83A1-F6EECF244321}">
-                <p14:modId xmlns:p14="http://schemas.microsoft.com/office/powerpoint/2010/main" val="2368139133"/>
+                <p14:modId xmlns:p14="http://schemas.microsoft.com/office/powerpoint/2010/main" val="429689047"/>
               </p:ext>
             </p:extLst>
           </p:nvPr>
         </p:nvGraphicFramePr>
         <p:xfrm>
-          <a:off x="6050159" y="3408010"/>
-          <a:ext cx="2990209" cy="1488768"/>
+          <a:off x="6050159" y="3212938"/>
+          <a:ext cx="2990209" cy="1775213"/>
         </p:xfrm>
         <a:graphic>
           <a:graphicData uri="http://schemas.openxmlformats.org/drawingml/2006/table">
@@ -16295,14 +16269,14 @@
                         <a:buNone/>
                       </a:pPr>
                       <a:r>
-                        <a:rPr lang="es-ES" sz="900" b="0">
+                        <a:rPr lang="es-ES" sz="900" b="0" dirty="0">
                           <a:effectLst/>
                           <a:latin typeface="Golos Text ExtraBold" panose="020B0604020202020204" charset="0"/>
                           <a:cs typeface="Golos Text ExtraBold" panose="020B0604020202020204" charset="0"/>
                         </a:rPr>
                         <a:t>RL</a:t>
                       </a:r>
-                      <a:endParaRPr lang="es-PE" sz="900" b="0">
+                      <a:endParaRPr lang="es-PE" sz="900" b="0" dirty="0">
                         <a:effectLst/>
                         <a:latin typeface="Golos Text ExtraBold" panose="020B0604020202020204" charset="0"/>
                         <a:ea typeface="Arial" panose="020B0604020202020204" pitchFamily="34" charset="0"/>
@@ -16341,6 +16315,55 @@
                 <a:extLst>
                   <a:ext uri="{0D108BD9-81ED-4DB2-BD59-A6C34878D82A}">
                     <a16:rowId xmlns:a16="http://schemas.microsoft.com/office/drawing/2014/main" val="4123051918"/>
+                  </a:ext>
+                </a:extLst>
+              </a:tr>
+              <a:tr h="137568">
+                <a:tc>
+                  <a:txBody>
+                    <a:bodyPr/>
+                    <a:lstStyle/>
+                    <a:p>
+                      <a:pPr algn="l">
+                        <a:buNone/>
+                      </a:pPr>
+                      <a:r>
+                        <a:rPr lang="es-PE" sz="900" b="0" dirty="0">
+                          <a:effectLst/>
+                          <a:latin typeface="Golos Text ExtraBold" panose="020B0604020202020204" charset="0"/>
+                          <a:ea typeface="Arial" panose="020B0604020202020204" pitchFamily="34" charset="0"/>
+                          <a:cs typeface="Golos Text ExtraBold" panose="020B0604020202020204" charset="0"/>
+                        </a:rPr>
+                        <a:t>Z tiempo</a:t>
+                      </a:r>
+                    </a:p>
+                  </a:txBody>
+                  <a:tcPr marL="68580" marR="68580" marT="0" marB="0"/>
+                </a:tc>
+                <a:tc>
+                  <a:txBody>
+                    <a:bodyPr/>
+                    <a:lstStyle/>
+                    <a:p>
+                      <a:pPr algn="l">
+                        <a:buNone/>
+                      </a:pPr>
+                      <a:r>
+                        <a:rPr lang="es-PE" sz="900" b="0" dirty="0">
+                          <a:effectLst/>
+                          <a:latin typeface="Golos Text ExtraBold" panose="020B0604020202020204" charset="0"/>
+                          <a:ea typeface="Arial" panose="020B0604020202020204" pitchFamily="34" charset="0"/>
+                          <a:cs typeface="Golos Text ExtraBold" panose="020B0604020202020204" charset="0"/>
+                        </a:rPr>
+                        <a:t>Pasó “Z” tiempo.</a:t>
+                      </a:r>
+                    </a:p>
+                  </a:txBody>
+                  <a:tcPr marL="68580" marR="68580" marT="0" marB="0"/>
+                </a:tc>
+                <a:extLst>
+                  <a:ext uri="{0D108BD9-81ED-4DB2-BD59-A6C34878D82A}">
+                    <a16:rowId xmlns:a16="http://schemas.microsoft.com/office/drawing/2014/main" val="2495836128"/>
                   </a:ext>
                 </a:extLst>
               </a:tr>
@@ -16413,14 +16436,14 @@
                         <a:buNone/>
                       </a:pPr>
                       <a:r>
-                        <a:rPr lang="es-ES" sz="900" b="0">
+                        <a:rPr lang="es-ES" sz="900" b="0" dirty="0">
                           <a:effectLst/>
                           <a:latin typeface="Golos Text ExtraBold" panose="020B0604020202020204" charset="0"/>
                           <a:cs typeface="Golos Text ExtraBold" panose="020B0604020202020204" charset="0"/>
                         </a:rPr>
                         <a:t>Trafico2</a:t>
                       </a:r>
-                      <a:endParaRPr lang="es-PE" sz="900" b="0">
+                      <a:endParaRPr lang="es-PE" sz="900" b="0" dirty="0">
                         <a:effectLst/>
                         <a:latin typeface="Golos Text ExtraBold" panose="020B0604020202020204" charset="0"/>
                         <a:ea typeface="Arial" panose="020B0604020202020204" pitchFamily="34" charset="0"/>
@@ -16462,6 +16485,55 @@
                   </a:ext>
                 </a:extLst>
               </a:tr>
+              <a:tr h="148877">
+                <a:tc>
+                  <a:txBody>
+                    <a:bodyPr/>
+                    <a:lstStyle/>
+                    <a:p>
+                      <a:pPr algn="l">
+                        <a:buNone/>
+                      </a:pPr>
+                      <a:r>
+                        <a:rPr lang="es-PE" sz="900" b="0" dirty="0">
+                          <a:effectLst/>
+                          <a:latin typeface="Golos Text ExtraBold" panose="020B0604020202020204" charset="0"/>
+                          <a:ea typeface="Arial" panose="020B0604020202020204" pitchFamily="34" charset="0"/>
+                          <a:cs typeface="Golos Text ExtraBold" panose="020B0604020202020204" charset="0"/>
+                        </a:rPr>
+                        <a:t>Botón</a:t>
+                      </a:r>
+                    </a:p>
+                  </a:txBody>
+                  <a:tcPr marL="68580" marR="68580" marT="0" marB="0"/>
+                </a:tc>
+                <a:tc>
+                  <a:txBody>
+                    <a:bodyPr/>
+                    <a:lstStyle/>
+                    <a:p>
+                      <a:pPr algn="l">
+                        <a:buNone/>
+                      </a:pPr>
+                      <a:r>
+                        <a:rPr lang="es-PE" sz="900" b="0" dirty="0">
+                          <a:effectLst/>
+                          <a:latin typeface="Golos Text ExtraBold" panose="020B0604020202020204" charset="0"/>
+                          <a:ea typeface="Arial" panose="020B0604020202020204" pitchFamily="34" charset="0"/>
+                          <a:cs typeface="Golos Text ExtraBold" panose="020B0604020202020204" charset="0"/>
+                        </a:rPr>
+                        <a:t>Se ha presionado el botón.</a:t>
+                      </a:r>
+                    </a:p>
+                  </a:txBody>
+                  <a:tcPr marL="68580" marR="68580" marT="0" marB="0"/>
+                </a:tc>
+                <a:extLst>
+                  <a:ext uri="{0D108BD9-81ED-4DB2-BD59-A6C34878D82A}">
+                    <a16:rowId xmlns:a16="http://schemas.microsoft.com/office/drawing/2014/main" val="3939219443"/>
+                  </a:ext>
+                </a:extLst>
+              </a:tr>
             </a:tbl>
           </a:graphicData>
         </a:graphic>
@@ -16481,14 +16553,14 @@
           <p:nvPr>
             <p:extLst>
               <p:ext uri="{D42A27DB-BD31-4B8C-83A1-F6EECF244321}">
-                <p14:modId xmlns:p14="http://schemas.microsoft.com/office/powerpoint/2010/main" val="3826656520"/>
+                <p14:modId xmlns:p14="http://schemas.microsoft.com/office/powerpoint/2010/main" val="4248092240"/>
               </p:ext>
             </p:extLst>
           </p:nvPr>
         </p:nvGraphicFramePr>
         <p:xfrm>
-          <a:off x="6260975" y="1943993"/>
-          <a:ext cx="2568575" cy="1213485"/>
+          <a:off x="6328857" y="1659458"/>
+          <a:ext cx="2568575" cy="1386840"/>
         </p:xfrm>
         <a:graphic>
           <a:graphicData uri="http://schemas.openxmlformats.org/drawingml/2006/table">
@@ -16555,14 +16627,14 @@
                         <a:buNone/>
                       </a:pPr>
                       <a:r>
-                        <a:rPr lang="es-ES" sz="1100">
+                        <a:rPr lang="es-ES" sz="1100" dirty="0">
                           <a:effectLst/>
                           <a:latin typeface="Golos Text ExtraBold" panose="020B0604020202020204" charset="0"/>
                           <a:cs typeface="Golos Text ExtraBold" panose="020B0604020202020204" charset="0"/>
                         </a:rPr>
                         <a:t>Semáforo 1 (S1)</a:t>
                       </a:r>
-                      <a:endParaRPr lang="es-PE" sz="1100">
+                      <a:endParaRPr lang="es-PE" sz="1100" dirty="0">
                         <a:effectLst/>
                         <a:latin typeface="Golos Text ExtraBold" panose="020B0604020202020204" charset="0"/>
                         <a:ea typeface="Arial" panose="020B0604020202020204" pitchFamily="34" charset="0"/>
@@ -16954,14 +17026,14 @@
                         <a:buNone/>
                       </a:pPr>
                       <a:r>
-                        <a:rPr lang="es-ES" sz="1100">
+                        <a:rPr lang="es-ES" sz="1100" dirty="0">
                           <a:effectLst/>
                           <a:latin typeface="Golos Text ExtraBold" panose="020B0604020202020204" charset="0"/>
                           <a:cs typeface="Golos Text ExtraBold" panose="020B0604020202020204" charset="0"/>
                         </a:rPr>
                         <a:t>EN</a:t>
                       </a:r>
-                      <a:endParaRPr lang="es-PE" sz="1100">
+                      <a:endParaRPr lang="es-PE" sz="1100" dirty="0">
                         <a:effectLst/>
                         <a:latin typeface="Golos Text ExtraBold" panose="020B0604020202020204" charset="0"/>
                         <a:ea typeface="Arial" panose="020B0604020202020204" pitchFamily="34" charset="0"/>
@@ -16980,14 +17052,14 @@
                         <a:buNone/>
                       </a:pPr>
                       <a:r>
-                        <a:rPr lang="es-ES" sz="1100">
+                        <a:rPr lang="es-ES" sz="1100" dirty="0">
                           <a:effectLst/>
                           <a:latin typeface="Golos Text ExtraBold" panose="020B0604020202020204" charset="0"/>
                           <a:cs typeface="Golos Text ExtraBold" panose="020B0604020202020204" charset="0"/>
                         </a:rPr>
                         <a:t>Amarillo</a:t>
                       </a:r>
-                      <a:endParaRPr lang="es-PE" sz="1100">
+                      <a:endParaRPr lang="es-PE" sz="1100" dirty="0">
                         <a:effectLst/>
                         <a:latin typeface="Golos Text ExtraBold" panose="020B0604020202020204" charset="0"/>
                         <a:ea typeface="Arial" panose="020B0604020202020204" pitchFamily="34" charset="0"/>
@@ -17029,10 +17101,110 @@
                   </a:ext>
                 </a:extLst>
               </a:tr>
+              <a:tr h="173355">
+                <a:tc>
+                  <a:txBody>
+                    <a:bodyPr/>
+                    <a:lstStyle/>
+                    <a:p>
+                      <a:pPr algn="ctr">
+                        <a:buNone/>
+                      </a:pPr>
+                      <a:r>
+                        <a:rPr lang="es-PE" sz="1100" dirty="0">
+                          <a:effectLst/>
+                          <a:latin typeface="Golos Text ExtraBold" panose="020B0604020202020204" charset="0"/>
+                          <a:ea typeface="Arial" panose="020B0604020202020204" pitchFamily="34" charset="0"/>
+                          <a:cs typeface="Golos Text ExtraBold" panose="020B0604020202020204" charset="0"/>
+                        </a:rPr>
+                        <a:t>E5</a:t>
+                      </a:r>
+                    </a:p>
+                  </a:txBody>
+                  <a:tcPr marL="68580" marR="68580" marT="0" marB="0"/>
+                </a:tc>
+                <a:tc>
+                  <a:txBody>
+                    <a:bodyPr/>
+                    <a:lstStyle/>
+                    <a:p>
+                      <a:pPr algn="ctr">
+                        <a:buNone/>
+                      </a:pPr>
+                      <a:r>
+                        <a:rPr lang="es-PE" sz="1100" dirty="0">
+                          <a:effectLst/>
+                          <a:latin typeface="Golos Text ExtraBold" panose="020B0604020202020204" charset="0"/>
+                          <a:ea typeface="Arial" panose="020B0604020202020204" pitchFamily="34" charset="0"/>
+                          <a:cs typeface="Golos Text ExtraBold" panose="020B0604020202020204" charset="0"/>
+                        </a:rPr>
+                        <a:t>Rojo</a:t>
+                      </a:r>
+                    </a:p>
+                  </a:txBody>
+                  <a:tcPr marL="68580" marR="68580" marT="0" marB="0"/>
+                </a:tc>
+                <a:tc>
+                  <a:txBody>
+                    <a:bodyPr/>
+                    <a:lstStyle/>
+                    <a:p>
+                      <a:pPr algn="ctr">
+                        <a:buNone/>
+                      </a:pPr>
+                      <a:r>
+                        <a:rPr lang="es-PE" sz="1100" dirty="0">
+                          <a:effectLst/>
+                          <a:latin typeface="Golos Text ExtraBold" panose="020B0604020202020204" charset="0"/>
+                          <a:ea typeface="Arial" panose="020B0604020202020204" pitchFamily="34" charset="0"/>
+                          <a:cs typeface="Golos Text ExtraBold" panose="020B0604020202020204" charset="0"/>
+                        </a:rPr>
+                        <a:t>Rojo</a:t>
+                      </a:r>
+                    </a:p>
+                  </a:txBody>
+                  <a:tcPr marL="68580" marR="68580" marT="0" marB="0"/>
+                </a:tc>
+                <a:extLst>
+                  <a:ext uri="{0D108BD9-81ED-4DB2-BD59-A6C34878D82A}">
+                    <a16:rowId xmlns:a16="http://schemas.microsoft.com/office/drawing/2014/main" val="3057885728"/>
+                  </a:ext>
+                </a:extLst>
+              </a:tr>
             </a:tbl>
           </a:graphicData>
         </a:graphic>
       </p:graphicFrame>
+      <p:pic>
+        <p:nvPicPr>
+          <p:cNvPr id="3" name="Imagen 2">
+            <a:extLst>
+              <a:ext uri="{FF2B5EF4-FFF2-40B4-BE49-F238E27FC236}">
+                <a16:creationId xmlns:a16="http://schemas.microsoft.com/office/drawing/2014/main" id="{BC03591A-FE19-E8D5-0062-4ED4FF2E5A4F}"/>
+              </a:ext>
+            </a:extLst>
+          </p:cNvPr>
+          <p:cNvPicPr>
+            <a:picLocks noChangeAspect="1"/>
+          </p:cNvPicPr>
+          <p:nvPr/>
+        </p:nvPicPr>
+        <p:blipFill>
+          <a:blip r:embed="rId4"/>
+          <a:stretch>
+            <a:fillRect/>
+          </a:stretch>
+        </p:blipFill>
+        <p:spPr>
+          <a:xfrm>
+            <a:off x="559017" y="1024772"/>
+            <a:ext cx="5177319" cy="3414730"/>
+          </a:xfrm>
+          <a:prstGeom prst="rect">
+            <a:avLst/>
+          </a:prstGeom>
+        </p:spPr>
+      </p:pic>
     </p:spTree>
   </p:cSld>
   <p:clrMapOvr>
